--- a/Cloud Computing/03.3. Google Cloud Platform.pptx
+++ b/Cloud Computing/03.3. Google Cloud Platform.pptx
@@ -5,34 +5,36 @@
     <p:sldMasterId id="2147483708" r:id="rId1"/>
   </p:sldMasterIdLst>
   <p:notesMasterIdLst>
-    <p:notesMasterId r:id="rId27"/>
+    <p:notesMasterId r:id="rId29"/>
   </p:notesMasterIdLst>
   <p:sldIdLst>
     <p:sldId id="441" r:id="rId2"/>
     <p:sldId id="442" r:id="rId3"/>
     <p:sldId id="443" r:id="rId4"/>
     <p:sldId id="444" r:id="rId5"/>
-    <p:sldId id="454" r:id="rId6"/>
-    <p:sldId id="467" r:id="rId7"/>
-    <p:sldId id="468" r:id="rId8"/>
-    <p:sldId id="456" r:id="rId9"/>
-    <p:sldId id="457" r:id="rId10"/>
-    <p:sldId id="458" r:id="rId11"/>
-    <p:sldId id="459" r:id="rId12"/>
-    <p:sldId id="460" r:id="rId13"/>
-    <p:sldId id="461" r:id="rId14"/>
-    <p:sldId id="462" r:id="rId15"/>
-    <p:sldId id="463" r:id="rId16"/>
-    <p:sldId id="464" r:id="rId17"/>
-    <p:sldId id="465" r:id="rId18"/>
-    <p:sldId id="466" r:id="rId19"/>
-    <p:sldId id="469" r:id="rId20"/>
-    <p:sldId id="470" r:id="rId21"/>
-    <p:sldId id="471" r:id="rId22"/>
-    <p:sldId id="472" r:id="rId23"/>
-    <p:sldId id="473" r:id="rId24"/>
-    <p:sldId id="474" r:id="rId25"/>
-    <p:sldId id="440" r:id="rId26"/>
+    <p:sldId id="476" r:id="rId6"/>
+    <p:sldId id="475" r:id="rId7"/>
+    <p:sldId id="454" r:id="rId8"/>
+    <p:sldId id="467" r:id="rId9"/>
+    <p:sldId id="468" r:id="rId10"/>
+    <p:sldId id="456" r:id="rId11"/>
+    <p:sldId id="457" r:id="rId12"/>
+    <p:sldId id="458" r:id="rId13"/>
+    <p:sldId id="459" r:id="rId14"/>
+    <p:sldId id="460" r:id="rId15"/>
+    <p:sldId id="461" r:id="rId16"/>
+    <p:sldId id="462" r:id="rId17"/>
+    <p:sldId id="463" r:id="rId18"/>
+    <p:sldId id="464" r:id="rId19"/>
+    <p:sldId id="465" r:id="rId20"/>
+    <p:sldId id="466" r:id="rId21"/>
+    <p:sldId id="469" r:id="rId22"/>
+    <p:sldId id="470" r:id="rId23"/>
+    <p:sldId id="471" r:id="rId24"/>
+    <p:sldId id="472" r:id="rId25"/>
+    <p:sldId id="473" r:id="rId26"/>
+    <p:sldId id="474" r:id="rId27"/>
+    <p:sldId id="440" r:id="rId28"/>
   </p:sldIdLst>
   <p:sldSz cx="9144000" cy="6858000" type="screen4x3"/>
   <p:notesSz cx="6858000" cy="9144000"/>
@@ -247,7 +249,7 @@
             <a:fld id="{0062591D-F63A-4C87-988A-2A4399BE3C42}" type="datetimeFigureOut">
               <a:rPr lang="en-US" smtClean="0"/>
               <a:pPr/>
-              <a:t>4/9/2026</a:t>
+              <a:t>8/26/2026</a:t>
             </a:fld>
             <a:endParaRPr lang="en-US"/>
           </a:p>
@@ -786,7 +788,7 @@
               <a:pPr>
                 <a:defRPr/>
               </a:pPr>
-              <a:t>4/9/2026</a:t>
+              <a:t>8/26/2026</a:t>
             </a:fld>
             <a:endParaRPr lang="en-US"/>
           </a:p>
@@ -978,7 +980,7 @@
               <a:pPr>
                 <a:defRPr/>
               </a:pPr>
-              <a:t>4/9/2026</a:t>
+              <a:t>8/26/2026</a:t>
             </a:fld>
             <a:endParaRPr lang="en-US"/>
           </a:p>
@@ -1180,7 +1182,7 @@
               <a:pPr>
                 <a:defRPr/>
               </a:pPr>
-              <a:t>4/9/2026</a:t>
+              <a:t>8/26/2026</a:t>
             </a:fld>
             <a:endParaRPr lang="en-US"/>
           </a:p>
@@ -1372,7 +1374,7 @@
               <a:pPr>
                 <a:defRPr/>
               </a:pPr>
-              <a:t>4/9/2026</a:t>
+              <a:t>8/26/2026</a:t>
             </a:fld>
             <a:endParaRPr lang="en-US"/>
           </a:p>
@@ -1640,7 +1642,7 @@
               <a:pPr>
                 <a:defRPr/>
               </a:pPr>
-              <a:t>4/9/2026</a:t>
+              <a:t>8/26/2026</a:t>
             </a:fld>
             <a:endParaRPr lang="en-US"/>
           </a:p>
@@ -1950,7 +1952,7 @@
               <a:pPr>
                 <a:defRPr/>
               </a:pPr>
-              <a:t>4/9/2026</a:t>
+              <a:t>8/26/2026</a:t>
             </a:fld>
             <a:endParaRPr lang="en-US"/>
           </a:p>
@@ -2394,7 +2396,7 @@
               <a:pPr>
                 <a:defRPr/>
               </a:pPr>
-              <a:t>4/9/2026</a:t>
+              <a:t>8/26/2026</a:t>
             </a:fld>
             <a:endParaRPr lang="en-US"/>
           </a:p>
@@ -2534,7 +2536,7 @@
               <a:pPr>
                 <a:defRPr/>
               </a:pPr>
-              <a:t>4/9/2026</a:t>
+              <a:t>8/26/2026</a:t>
             </a:fld>
             <a:endParaRPr lang="en-US"/>
           </a:p>
@@ -2651,7 +2653,7 @@
               <a:pPr>
                 <a:defRPr/>
               </a:pPr>
-              <a:t>4/9/2026</a:t>
+              <a:t>8/26/2026</a:t>
             </a:fld>
             <a:endParaRPr lang="en-US"/>
           </a:p>
@@ -2950,7 +2952,7 @@
               <a:pPr>
                 <a:defRPr/>
               </a:pPr>
-              <a:t>4/9/2026</a:t>
+              <a:t>8/26/2026</a:t>
             </a:fld>
             <a:endParaRPr lang="en-US"/>
           </a:p>
@@ -3228,7 +3230,7 @@
               <a:pPr>
                 <a:defRPr/>
               </a:pPr>
-              <a:t>4/9/2026</a:t>
+              <a:t>8/26/2026</a:t>
             </a:fld>
             <a:endParaRPr lang="en-US"/>
           </a:p>
@@ -3476,7 +3478,7 @@
               <a:pPr>
                 <a:defRPr/>
               </a:pPr>
-              <a:t>4/9/2026</a:t>
+              <a:t>8/26/2026</a:t>
             </a:fld>
             <a:endParaRPr lang="en-US"/>
           </a:p>
@@ -4155,6 +4157,168 @@
             <a:pPr algn="l"/>
             <a:r>
               <a:rPr lang="en-US" dirty="0" smtClean="0"/>
+              <a:t>2. Enable Google Drive API</a:t>
+            </a:r>
+            <a:endParaRPr lang="en-US" dirty="0"/>
+          </a:p>
+        </p:txBody>
+      </p:sp>
+      <p:pic>
+        <p:nvPicPr>
+          <p:cNvPr id="2050" name="Picture 2"/>
+          <p:cNvPicPr>
+            <a:picLocks noChangeAspect="1" noChangeArrowheads="1"/>
+          </p:cNvPicPr>
+          <p:nvPr/>
+        </p:nvPicPr>
+        <p:blipFill>
+          <a:blip r:embed="rId2" cstate="print"/>
+          <a:srcRect/>
+          <a:stretch>
+            <a:fillRect/>
+          </a:stretch>
+        </p:blipFill>
+        <p:spPr bwMode="auto">
+          <a:xfrm>
+            <a:off x="1970088" y="2187575"/>
+            <a:ext cx="5203825" cy="2917825"/>
+          </a:xfrm>
+          <a:prstGeom prst="rect">
+            <a:avLst/>
+          </a:prstGeom>
+          <a:noFill/>
+          <a:ln w="9525">
+            <a:noFill/>
+            <a:miter lim="800000"/>
+            <a:headEnd/>
+            <a:tailEnd/>
+          </a:ln>
+        </p:spPr>
+      </p:pic>
+    </p:spTree>
+  </p:cSld>
+  <p:clrMapOvr>
+    <a:masterClrMapping/>
+  </p:clrMapOvr>
+</p:sld>
+</file>
+
+<file path=ppt/slides/slide11.xml><?xml version="1.0" encoding="utf-8"?>
+<p:sld xmlns:a="http://schemas.openxmlformats.org/drawingml/2006/main" xmlns:r="http://schemas.openxmlformats.org/officeDocument/2006/relationships" xmlns:p="http://schemas.openxmlformats.org/presentationml/2006/main">
+  <p:cSld>
+    <p:spTree>
+      <p:nvGrpSpPr>
+        <p:cNvPr id="1" name=""/>
+        <p:cNvGrpSpPr/>
+        <p:nvPr/>
+      </p:nvGrpSpPr>
+      <p:grpSpPr>
+        <a:xfrm>
+          <a:off x="0" y="0"/>
+          <a:ext cx="0" cy="0"/>
+          <a:chOff x="0" y="0"/>
+          <a:chExt cx="0" cy="0"/>
+        </a:xfrm>
+      </p:grpSpPr>
+      <p:sp>
+        <p:nvSpPr>
+          <p:cNvPr id="2" name="Title 1"/>
+          <p:cNvSpPr>
+            <a:spLocks noGrp="1"/>
+          </p:cNvSpPr>
+          <p:nvPr>
+            <p:ph type="title"/>
+          </p:nvPr>
+        </p:nvSpPr>
+        <p:spPr/>
+        <p:txBody>
+          <a:bodyPr/>
+          <a:lstStyle/>
+          <a:p>
+            <a:pPr algn="l"/>
+            <a:r>
+              <a:rPr lang="en-US" dirty="0" smtClean="0"/>
+              <a:t>3. Configure Consent Screen</a:t>
+            </a:r>
+            <a:endParaRPr lang="en-US" dirty="0"/>
+          </a:p>
+        </p:txBody>
+      </p:sp>
+      <p:pic>
+        <p:nvPicPr>
+          <p:cNvPr id="3074" name="Picture 2"/>
+          <p:cNvPicPr>
+            <a:picLocks noChangeAspect="1" noChangeArrowheads="1"/>
+          </p:cNvPicPr>
+          <p:nvPr/>
+        </p:nvPicPr>
+        <p:blipFill>
+          <a:blip r:embed="rId2" cstate="print"/>
+          <a:srcRect/>
+          <a:stretch>
+            <a:fillRect/>
+          </a:stretch>
+        </p:blipFill>
+        <p:spPr bwMode="auto">
+          <a:xfrm>
+            <a:off x="547370" y="2667000"/>
+            <a:ext cx="8063230" cy="2000250"/>
+          </a:xfrm>
+          <a:prstGeom prst="rect">
+            <a:avLst/>
+          </a:prstGeom>
+          <a:noFill/>
+          <a:ln w="9525">
+            <a:noFill/>
+            <a:miter lim="800000"/>
+            <a:headEnd/>
+            <a:tailEnd/>
+          </a:ln>
+        </p:spPr>
+      </p:pic>
+    </p:spTree>
+  </p:cSld>
+  <p:clrMapOvr>
+    <a:masterClrMapping/>
+  </p:clrMapOvr>
+</p:sld>
+</file>
+
+<file path=ppt/slides/slide12.xml><?xml version="1.0" encoding="utf-8"?>
+<p:sld xmlns:a="http://schemas.openxmlformats.org/drawingml/2006/main" xmlns:r="http://schemas.openxmlformats.org/officeDocument/2006/relationships" xmlns:p="http://schemas.openxmlformats.org/presentationml/2006/main">
+  <p:cSld>
+    <p:spTree>
+      <p:nvGrpSpPr>
+        <p:cNvPr id="1" name=""/>
+        <p:cNvGrpSpPr/>
+        <p:nvPr/>
+      </p:nvGrpSpPr>
+      <p:grpSpPr>
+        <a:xfrm>
+          <a:off x="0" y="0"/>
+          <a:ext cx="0" cy="0"/>
+          <a:chOff x="0" y="0"/>
+          <a:chExt cx="0" cy="0"/>
+        </a:xfrm>
+      </p:grpSpPr>
+      <p:sp>
+        <p:nvSpPr>
+          <p:cNvPr id="2" name="Title 1"/>
+          <p:cNvSpPr>
+            <a:spLocks noGrp="1"/>
+          </p:cNvSpPr>
+          <p:nvPr>
+            <p:ph type="title"/>
+          </p:nvPr>
+        </p:nvSpPr>
+        <p:spPr/>
+        <p:txBody>
+          <a:bodyPr/>
+          <a:lstStyle/>
+          <a:p>
+            <a:pPr algn="l"/>
+            <a:r>
+              <a:rPr lang="en-US" dirty="0" smtClean="0"/>
               <a:t>4. Select External User Type</a:t>
             </a:r>
             <a:endParaRPr lang="en-US" dirty="0"/>
@@ -4201,7 +4365,7 @@
 </p:sld>
 </file>
 
-<file path=ppt/slides/slide11.xml><?xml version="1.0" encoding="utf-8"?>
+<file path=ppt/slides/slide13.xml><?xml version="1.0" encoding="utf-8"?>
 <p:sld xmlns:a="http://schemas.openxmlformats.org/drawingml/2006/main" xmlns:r="http://schemas.openxmlformats.org/officeDocument/2006/relationships" xmlns:p="http://schemas.openxmlformats.org/presentationml/2006/main">
   <p:cSld>
     <p:spTree>
@@ -4282,7 +4446,7 @@
 </p:sld>
 </file>
 
-<file path=ppt/slides/slide12.xml><?xml version="1.0" encoding="utf-8"?>
+<file path=ppt/slides/slide14.xml><?xml version="1.0" encoding="utf-8"?>
 <p:sld xmlns:a="http://schemas.openxmlformats.org/drawingml/2006/main" xmlns:r="http://schemas.openxmlformats.org/officeDocument/2006/relationships" xmlns:p="http://schemas.openxmlformats.org/presentationml/2006/main">
   <p:cSld>
     <p:spTree>
@@ -4363,7 +4527,7 @@
 </p:sld>
 </file>
 
-<file path=ppt/slides/slide13.xml><?xml version="1.0" encoding="utf-8"?>
+<file path=ppt/slides/slide15.xml><?xml version="1.0" encoding="utf-8"?>
 <p:sld xmlns:a="http://schemas.openxmlformats.org/drawingml/2006/main" xmlns:r="http://schemas.openxmlformats.org/officeDocument/2006/relationships" xmlns:p="http://schemas.openxmlformats.org/presentationml/2006/main">
   <p:cSld>
     <p:spTree>
@@ -4444,7 +4608,7 @@
 </p:sld>
 </file>
 
-<file path=ppt/slides/slide14.xml><?xml version="1.0" encoding="utf-8"?>
+<file path=ppt/slides/slide16.xml><?xml version="1.0" encoding="utf-8"?>
 <p:sld xmlns:a="http://schemas.openxmlformats.org/drawingml/2006/main" xmlns:r="http://schemas.openxmlformats.org/officeDocument/2006/relationships" xmlns:p="http://schemas.openxmlformats.org/presentationml/2006/main">
   <p:cSld>
     <p:spTree>
@@ -4533,7 +4697,7 @@
 </p:sld>
 </file>
 
-<file path=ppt/slides/slide15.xml><?xml version="1.0" encoding="utf-8"?>
+<file path=ppt/slides/slide17.xml><?xml version="1.0" encoding="utf-8"?>
 <p:sld xmlns:a="http://schemas.openxmlformats.org/drawingml/2006/main" xmlns:r="http://schemas.openxmlformats.org/officeDocument/2006/relationships" xmlns:p="http://schemas.openxmlformats.org/presentationml/2006/main">
   <p:cSld>
     <p:spTree>
@@ -4614,7 +4778,7 @@
 </p:sld>
 </file>
 
-<file path=ppt/slides/slide16.xml><?xml version="1.0" encoding="utf-8"?>
+<file path=ppt/slides/slide18.xml><?xml version="1.0" encoding="utf-8"?>
 <p:sld xmlns:a="http://schemas.openxmlformats.org/drawingml/2006/main" xmlns:r="http://schemas.openxmlformats.org/officeDocument/2006/relationships" xmlns:p="http://schemas.openxmlformats.org/presentationml/2006/main">
   <p:cSld>
     <p:spTree>
@@ -4695,7 +4859,7 @@
 </p:sld>
 </file>
 
-<file path=ppt/slides/slide17.xml><?xml version="1.0" encoding="utf-8"?>
+<file path=ppt/slides/slide19.xml><?xml version="1.0" encoding="utf-8"?>
 <p:sld xmlns:a="http://schemas.openxmlformats.org/drawingml/2006/main" xmlns:r="http://schemas.openxmlformats.org/officeDocument/2006/relationships" xmlns:p="http://schemas.openxmlformats.org/presentationml/2006/main">
   <p:cSld>
     <p:spTree>
@@ -4766,138 +4930,6 @@
             <a:headEnd/>
             <a:tailEnd/>
           </a:ln>
-        </p:spPr>
-      </p:pic>
-    </p:spTree>
-  </p:cSld>
-  <p:clrMapOvr>
-    <a:masterClrMapping/>
-  </p:clrMapOvr>
-</p:sld>
-</file>
-
-<file path=ppt/slides/slide18.xml><?xml version="1.0" encoding="utf-8"?>
-<p:sld xmlns:a="http://schemas.openxmlformats.org/drawingml/2006/main" xmlns:r="http://schemas.openxmlformats.org/officeDocument/2006/relationships" xmlns:p="http://schemas.openxmlformats.org/presentationml/2006/main">
-  <p:cSld>
-    <p:spTree>
-      <p:nvGrpSpPr>
-        <p:cNvPr id="1" name=""/>
-        <p:cNvGrpSpPr/>
-        <p:nvPr/>
-      </p:nvGrpSpPr>
-      <p:grpSpPr>
-        <a:xfrm>
-          <a:off x="0" y="0"/>
-          <a:ext cx="0" cy="0"/>
-          <a:chOff x="0" y="0"/>
-          <a:chExt cx="0" cy="0"/>
-        </a:xfrm>
-      </p:grpSpPr>
-      <p:sp>
-        <p:nvSpPr>
-          <p:cNvPr id="2" name="Title 1"/>
-          <p:cNvSpPr>
-            <a:spLocks noGrp="1"/>
-          </p:cNvSpPr>
-          <p:nvPr>
-            <p:ph type="title"/>
-          </p:nvPr>
-        </p:nvSpPr>
-        <p:spPr/>
-        <p:txBody>
-          <a:bodyPr/>
-          <a:lstStyle/>
-          <a:p>
-            <a:pPr algn="l"/>
-            <a:r>
-              <a:rPr lang="en-US" dirty="0" smtClean="0"/>
-              <a:t>12. Confirm Publishing</a:t>
-            </a:r>
-            <a:endParaRPr lang="en-US" dirty="0"/>
-          </a:p>
-        </p:txBody>
-      </p:sp>
-      <p:pic>
-        <p:nvPicPr>
-          <p:cNvPr id="12290" name="Picture 2"/>
-          <p:cNvPicPr>
-            <a:picLocks noChangeAspect="1" noChangeArrowheads="1"/>
-          </p:cNvPicPr>
-          <p:nvPr/>
-        </p:nvPicPr>
-        <p:blipFill>
-          <a:blip r:embed="rId2" cstate="print"/>
-          <a:srcRect/>
-          <a:stretch>
-            <a:fillRect/>
-          </a:stretch>
-        </p:blipFill>
-        <p:spPr bwMode="auto">
-          <a:xfrm>
-            <a:off x="1477963" y="2003425"/>
-            <a:ext cx="6188075" cy="4168775"/>
-          </a:xfrm>
-          <a:prstGeom prst="rect">
-            <a:avLst/>
-          </a:prstGeom>
-          <a:noFill/>
-          <a:ln w="9525">
-            <a:noFill/>
-            <a:miter lim="800000"/>
-            <a:headEnd/>
-            <a:tailEnd/>
-          </a:ln>
-        </p:spPr>
-      </p:pic>
-    </p:spTree>
-  </p:cSld>
-  <p:clrMapOvr>
-    <a:masterClrMapping/>
-  </p:clrMapOvr>
-</p:sld>
-</file>
-
-<file path=ppt/slides/slide19.xml><?xml version="1.0" encoding="utf-8"?>
-<p:sld xmlns:a="http://schemas.openxmlformats.org/drawingml/2006/main" xmlns:r="http://schemas.openxmlformats.org/officeDocument/2006/relationships" xmlns:p="http://schemas.openxmlformats.org/presentationml/2006/main">
-  <p:cSld>
-    <p:spTree>
-      <p:nvGrpSpPr>
-        <p:cNvPr id="1" name=""/>
-        <p:cNvGrpSpPr/>
-        <p:nvPr/>
-      </p:nvGrpSpPr>
-      <p:grpSpPr>
-        <a:xfrm>
-          <a:off x="0" y="0"/>
-          <a:ext cx="0" cy="0"/>
-          <a:chOff x="0" y="0"/>
-          <a:chExt cx="0" cy="0"/>
-        </a:xfrm>
-      </p:grpSpPr>
-      <p:pic>
-        <p:nvPicPr>
-          <p:cNvPr id="4" name="Picture 2" descr="https://lh3.ggpht.com/1IfZLL2QDSjZ0wS7sUhaMlsAOS8BBzdR3wZ1WawgRn7KZAM8nEVZYMOUM-lqQb0ikIzp=w300"/>
-          <p:cNvPicPr>
-            <a:picLocks noChangeAspect="1" noChangeArrowheads="1"/>
-          </p:cNvPicPr>
-          <p:nvPr/>
-        </p:nvPicPr>
-        <p:blipFill>
-          <a:blip r:embed="rId2" cstate="print"/>
-          <a:srcRect/>
-          <a:stretch>
-            <a:fillRect/>
-          </a:stretch>
-        </p:blipFill>
-        <p:spPr bwMode="auto">
-          <a:xfrm>
-            <a:off x="3276600" y="1905000"/>
-            <a:ext cx="2857500" cy="2857500"/>
-          </a:xfrm>
-          <a:prstGeom prst="rect">
-            <a:avLst/>
-          </a:prstGeom>
-          <a:noFill/>
         </p:spPr>
       </p:pic>
     </p:spTree>
@@ -5067,149 +5099,44 @@
             <a:pPr algn="l"/>
             <a:r>
               <a:rPr lang="en-US" dirty="0" smtClean="0"/>
-              <a:t>1. Download </a:t>
-            </a:r>
-            <a:r>
-              <a:rPr lang="en-US" dirty="0" err="1" smtClean="0"/>
-              <a:t>gdrive</a:t>
-            </a:r>
-            <a:r>
-              <a:rPr lang="en-US" dirty="0" smtClean="0"/>
-              <a:t> in </a:t>
-            </a:r>
-            <a:r>
-              <a:rPr lang="en-US" dirty="0" err="1" smtClean="0"/>
-              <a:t>Ubuntu</a:t>
+              <a:t>12. Confirm Publishing</a:t>
             </a:r>
             <a:endParaRPr lang="en-US" dirty="0"/>
           </a:p>
         </p:txBody>
       </p:sp>
-      <p:sp>
-        <p:nvSpPr>
-          <p:cNvPr id="3" name="Content Placeholder 2"/>
-          <p:cNvSpPr>
-            <a:spLocks noGrp="1"/>
-          </p:cNvSpPr>
-          <p:nvPr>
-            <p:ph idx="1"/>
-          </p:nvPr>
-        </p:nvSpPr>
-        <p:spPr/>
-        <p:txBody>
-          <a:bodyPr/>
-          <a:lstStyle/>
-          <a:p>
-            <a:r>
-              <a:rPr lang="en-US" sz="1800" dirty="0" err="1" smtClean="0">
-                <a:latin typeface="Consolas" pitchFamily="49" charset="0"/>
-              </a:rPr>
-              <a:t>wget</a:t>
-            </a:r>
-            <a:r>
-              <a:rPr lang="en-US" sz="1800" dirty="0" smtClean="0">
-                <a:latin typeface="Consolas" pitchFamily="49" charset="0"/>
-              </a:rPr>
-              <a:t> https://github.com/glotlabs/gdrive/releases/download/3.9.0/gdrive_linux-x64.tar.gz</a:t>
-            </a:r>
-          </a:p>
-          <a:p>
-            <a:r>
-              <a:rPr lang="en-US" sz="1800" dirty="0" err="1" smtClean="0">
-                <a:latin typeface="Consolas" pitchFamily="49" charset="0"/>
-              </a:rPr>
-              <a:t>ls</a:t>
-            </a:r>
-            <a:endParaRPr lang="en-US" sz="1800" dirty="0" smtClean="0">
-              <a:latin typeface="Consolas" pitchFamily="49" charset="0"/>
-            </a:endParaRPr>
-          </a:p>
-          <a:p>
-            <a:r>
-              <a:rPr lang="en-US" sz="1800" dirty="0" smtClean="0">
-                <a:latin typeface="Consolas" pitchFamily="49" charset="0"/>
-              </a:rPr>
-              <a:t>tar </a:t>
-            </a:r>
-            <a:r>
-              <a:rPr lang="en-US" sz="1800" dirty="0" err="1" smtClean="0">
-                <a:latin typeface="Consolas" pitchFamily="49" charset="0"/>
-              </a:rPr>
-              <a:t>xzvf</a:t>
-            </a:r>
-            <a:r>
-              <a:rPr lang="en-US" sz="1800" dirty="0" smtClean="0">
-                <a:latin typeface="Consolas" pitchFamily="49" charset="0"/>
-              </a:rPr>
-              <a:t> gdrive_linux-x64.tar.gz</a:t>
-            </a:r>
-          </a:p>
-          <a:p>
-            <a:r>
-              <a:rPr lang="en-US" sz="1800" dirty="0" err="1" smtClean="0">
-                <a:latin typeface="Consolas" pitchFamily="49" charset="0"/>
-              </a:rPr>
-              <a:t>ls</a:t>
-            </a:r>
-            <a:endParaRPr lang="en-US" sz="1800" dirty="0" smtClean="0">
-              <a:latin typeface="Consolas" pitchFamily="49" charset="0"/>
-            </a:endParaRPr>
-          </a:p>
-          <a:p>
-            <a:r>
-              <a:rPr lang="en-US" sz="1800" dirty="0" err="1" smtClean="0">
-                <a:latin typeface="Consolas" pitchFamily="49" charset="0"/>
-              </a:rPr>
-              <a:t>sudo</a:t>
-            </a:r>
-            <a:r>
-              <a:rPr lang="en-US" sz="1800" dirty="0" smtClean="0">
-                <a:latin typeface="Consolas" pitchFamily="49" charset="0"/>
-              </a:rPr>
-              <a:t> </a:t>
-            </a:r>
-            <a:r>
-              <a:rPr lang="en-US" sz="1800" dirty="0" err="1" smtClean="0">
-                <a:latin typeface="Consolas" pitchFamily="49" charset="0"/>
-              </a:rPr>
-              <a:t>mv</a:t>
-            </a:r>
-            <a:r>
-              <a:rPr lang="en-US" sz="1800" dirty="0" smtClean="0">
-                <a:latin typeface="Consolas" pitchFamily="49" charset="0"/>
-              </a:rPr>
-              <a:t> </a:t>
-            </a:r>
-            <a:r>
-              <a:rPr lang="en-US" sz="1800" dirty="0" err="1" smtClean="0">
-                <a:latin typeface="Consolas" pitchFamily="49" charset="0"/>
-              </a:rPr>
-              <a:t>gdrive</a:t>
-            </a:r>
-            <a:r>
-              <a:rPr lang="en-US" sz="1800" dirty="0" smtClean="0">
-                <a:latin typeface="Consolas" pitchFamily="49" charset="0"/>
-              </a:rPr>
-              <a:t> /</a:t>
-            </a:r>
-            <a:r>
-              <a:rPr lang="en-US" sz="1800" dirty="0" err="1" smtClean="0">
-                <a:latin typeface="Consolas" pitchFamily="49" charset="0"/>
-              </a:rPr>
-              <a:t>usr</a:t>
-            </a:r>
-            <a:r>
-              <a:rPr lang="en-US" sz="1800" dirty="0" smtClean="0">
-                <a:latin typeface="Consolas" pitchFamily="49" charset="0"/>
-              </a:rPr>
-              <a:t>/local/bin</a:t>
-            </a:r>
-            <a:endParaRPr lang="en-US" sz="1800" dirty="0">
-              <a:latin typeface="Consolas" pitchFamily="49" charset="0"/>
-            </a:endParaRPr>
-          </a:p>
-        </p:txBody>
-      </p:sp>
+      <p:pic>
+        <p:nvPicPr>
+          <p:cNvPr id="12290" name="Picture 2"/>
+          <p:cNvPicPr>
+            <a:picLocks noChangeAspect="1" noChangeArrowheads="1"/>
+          </p:cNvPicPr>
+          <p:nvPr/>
+        </p:nvPicPr>
+        <p:blipFill>
+          <a:blip r:embed="rId2" cstate="print"/>
+          <a:srcRect/>
+          <a:stretch>
+            <a:fillRect/>
+          </a:stretch>
+        </p:blipFill>
+        <p:spPr bwMode="auto">
+          <a:xfrm>
+            <a:off x="1477963" y="2003425"/>
+            <a:ext cx="6188075" cy="4168775"/>
+          </a:xfrm>
+          <a:prstGeom prst="rect">
+            <a:avLst/>
+          </a:prstGeom>
+          <a:noFill/>
+          <a:ln w="9525">
+            <a:noFill/>
+            <a:miter lim="800000"/>
+            <a:headEnd/>
+            <a:tailEnd/>
+          </a:ln>
+        </p:spPr>
+      </p:pic>
     </p:spTree>
   </p:cSld>
   <p:clrMapOvr>
@@ -5219,105 +5146,6 @@
 </file>
 
 <file path=ppt/slides/slide21.xml><?xml version="1.0" encoding="utf-8"?>
-<p:sld xmlns:a="http://schemas.openxmlformats.org/drawingml/2006/main" xmlns:r="http://schemas.openxmlformats.org/officeDocument/2006/relationships" xmlns:p="http://schemas.openxmlformats.org/presentationml/2006/main">
-  <p:cSld>
-    <p:spTree>
-      <p:nvGrpSpPr>
-        <p:cNvPr id="1" name=""/>
-        <p:cNvGrpSpPr/>
-        <p:nvPr/>
-      </p:nvGrpSpPr>
-      <p:grpSpPr>
-        <a:xfrm>
-          <a:off x="0" y="0"/>
-          <a:ext cx="0" cy="0"/>
-          <a:chOff x="0" y="0"/>
-          <a:chExt cx="0" cy="0"/>
-        </a:xfrm>
-      </p:grpSpPr>
-      <p:sp>
-        <p:nvSpPr>
-          <p:cNvPr id="2" name="Title 1"/>
-          <p:cNvSpPr>
-            <a:spLocks noGrp="1"/>
-          </p:cNvSpPr>
-          <p:nvPr>
-            <p:ph type="title"/>
-          </p:nvPr>
-        </p:nvSpPr>
-        <p:spPr/>
-        <p:txBody>
-          <a:bodyPr/>
-          <a:lstStyle/>
-          <a:p>
-            <a:pPr algn="l"/>
-            <a:r>
-              <a:rPr lang="en-US" dirty="0" smtClean="0"/>
-              <a:t>2. Use </a:t>
-            </a:r>
-            <a:r>
-              <a:rPr lang="en-US" dirty="0" err="1" smtClean="0"/>
-              <a:t>gdrive</a:t>
-            </a:r>
-            <a:r>
-              <a:rPr lang="en-US" dirty="0" smtClean="0"/>
-              <a:t> on </a:t>
-            </a:r>
-            <a:r>
-              <a:rPr lang="en-US" smtClean="0"/>
-              <a:t>a Remote Server</a:t>
-            </a:r>
-            <a:endParaRPr lang="en-US" dirty="0"/>
-          </a:p>
-        </p:txBody>
-      </p:sp>
-      <p:sp>
-        <p:nvSpPr>
-          <p:cNvPr id="3" name="Content Placeholder 2"/>
-          <p:cNvSpPr>
-            <a:spLocks noGrp="1"/>
-          </p:cNvSpPr>
-          <p:nvPr>
-            <p:ph idx="1"/>
-          </p:nvPr>
-        </p:nvSpPr>
-        <p:spPr/>
-        <p:txBody>
-          <a:bodyPr/>
-          <a:lstStyle/>
-          <a:p>
-            <a:r>
-              <a:rPr lang="en-US" sz="2200" dirty="0" smtClean="0">
-                <a:latin typeface="Consolas" pitchFamily="49" charset="0"/>
-                <a:hlinkClick r:id="rId2"/>
-              </a:rPr>
-              <a:t>https://github.com/glotlabs/gdrive/#using-gdrive-on-a-remote-server</a:t>
-            </a:r>
-          </a:p>
-          <a:p>
-            <a:r>
-              <a:rPr lang="en-US" sz="2400" dirty="0" err="1" smtClean="0"/>
-              <a:t>gdrive</a:t>
-            </a:r>
-            <a:r>
-              <a:rPr lang="en-US" sz="2400" dirty="0" smtClean="0"/>
-              <a:t> account add</a:t>
-            </a:r>
-            <a:endParaRPr lang="en-US" sz="2200" dirty="0">
-              <a:latin typeface="Consolas" pitchFamily="49" charset="0"/>
-            </a:endParaRPr>
-          </a:p>
-        </p:txBody>
-      </p:sp>
-    </p:spTree>
-  </p:cSld>
-  <p:clrMapOvr>
-    <a:masterClrMapping/>
-  </p:clrMapOvr>
-</p:sld>
-</file>
-
-<file path=ppt/slides/slide22.xml><?xml version="1.0" encoding="utf-8"?>
 <p:sld xmlns:a="http://schemas.openxmlformats.org/drawingml/2006/main" xmlns:r="http://schemas.openxmlformats.org/officeDocument/2006/relationships" xmlns:p="http://schemas.openxmlformats.org/presentationml/2006/main">
   <p:cSld>
     <p:spTree>
@@ -5368,6 +5196,192 @@
 </p:sld>
 </file>
 
+<file path=ppt/slides/slide22.xml><?xml version="1.0" encoding="utf-8"?>
+<p:sld xmlns:a="http://schemas.openxmlformats.org/drawingml/2006/main" xmlns:r="http://schemas.openxmlformats.org/officeDocument/2006/relationships" xmlns:p="http://schemas.openxmlformats.org/presentationml/2006/main">
+  <p:cSld>
+    <p:spTree>
+      <p:nvGrpSpPr>
+        <p:cNvPr id="1" name=""/>
+        <p:cNvGrpSpPr/>
+        <p:nvPr/>
+      </p:nvGrpSpPr>
+      <p:grpSpPr>
+        <a:xfrm>
+          <a:off x="0" y="0"/>
+          <a:ext cx="0" cy="0"/>
+          <a:chOff x="0" y="0"/>
+          <a:chExt cx="0" cy="0"/>
+        </a:xfrm>
+      </p:grpSpPr>
+      <p:sp>
+        <p:nvSpPr>
+          <p:cNvPr id="2" name="Title 1"/>
+          <p:cNvSpPr>
+            <a:spLocks noGrp="1"/>
+          </p:cNvSpPr>
+          <p:nvPr>
+            <p:ph type="title"/>
+          </p:nvPr>
+        </p:nvSpPr>
+        <p:spPr/>
+        <p:txBody>
+          <a:bodyPr/>
+          <a:lstStyle/>
+          <a:p>
+            <a:pPr algn="l"/>
+            <a:r>
+              <a:rPr lang="en-US" dirty="0" smtClean="0"/>
+              <a:t>1. Download </a:t>
+            </a:r>
+            <a:r>
+              <a:rPr lang="en-US" dirty="0" err="1" smtClean="0"/>
+              <a:t>gdrive</a:t>
+            </a:r>
+            <a:r>
+              <a:rPr lang="en-US" dirty="0" smtClean="0"/>
+              <a:t> in </a:t>
+            </a:r>
+            <a:r>
+              <a:rPr lang="en-US" dirty="0" err="1" smtClean="0"/>
+              <a:t>Ubuntu</a:t>
+            </a:r>
+            <a:endParaRPr lang="en-US" dirty="0"/>
+          </a:p>
+        </p:txBody>
+      </p:sp>
+      <p:sp>
+        <p:nvSpPr>
+          <p:cNvPr id="3" name="Content Placeholder 2"/>
+          <p:cNvSpPr>
+            <a:spLocks noGrp="1"/>
+          </p:cNvSpPr>
+          <p:nvPr>
+            <p:ph idx="1"/>
+          </p:nvPr>
+        </p:nvSpPr>
+        <p:spPr/>
+        <p:txBody>
+          <a:bodyPr/>
+          <a:lstStyle/>
+          <a:p>
+            <a:r>
+              <a:rPr lang="en-US" sz="1800" dirty="0" err="1" smtClean="0">
+                <a:latin typeface="Consolas" pitchFamily="49" charset="0"/>
+              </a:rPr>
+              <a:t>wget</a:t>
+            </a:r>
+            <a:r>
+              <a:rPr lang="en-US" sz="1800" dirty="0" smtClean="0">
+                <a:latin typeface="Consolas" pitchFamily="49" charset="0"/>
+              </a:rPr>
+              <a:t> https://github.com/glotlabs/gdrive/releases/download/3.9.0/gdrive_linux-x64.tar.gz</a:t>
+            </a:r>
+          </a:p>
+          <a:p>
+            <a:r>
+              <a:rPr lang="en-US" sz="1800" dirty="0" err="1" smtClean="0">
+                <a:latin typeface="Consolas" pitchFamily="49" charset="0"/>
+              </a:rPr>
+              <a:t>ls</a:t>
+            </a:r>
+            <a:endParaRPr lang="en-US" sz="1800" dirty="0" smtClean="0">
+              <a:latin typeface="Consolas" pitchFamily="49" charset="0"/>
+            </a:endParaRPr>
+          </a:p>
+          <a:p>
+            <a:r>
+              <a:rPr lang="en-US" sz="1800" dirty="0" smtClean="0">
+                <a:latin typeface="Consolas" pitchFamily="49" charset="0"/>
+              </a:rPr>
+              <a:t>tar </a:t>
+            </a:r>
+            <a:r>
+              <a:rPr lang="en-US" sz="1800" dirty="0" err="1" smtClean="0">
+                <a:latin typeface="Consolas" pitchFamily="49" charset="0"/>
+              </a:rPr>
+              <a:t>xzvf</a:t>
+            </a:r>
+            <a:r>
+              <a:rPr lang="en-US" sz="1800" dirty="0" smtClean="0">
+                <a:latin typeface="Consolas" pitchFamily="49" charset="0"/>
+              </a:rPr>
+              <a:t> gdrive_linux-x64.tar.gz</a:t>
+            </a:r>
+          </a:p>
+          <a:p>
+            <a:r>
+              <a:rPr lang="en-US" sz="1800" dirty="0" err="1" smtClean="0">
+                <a:latin typeface="Consolas" pitchFamily="49" charset="0"/>
+              </a:rPr>
+              <a:t>ls</a:t>
+            </a:r>
+            <a:endParaRPr lang="en-US" sz="1800" dirty="0" smtClean="0">
+              <a:latin typeface="Consolas" pitchFamily="49" charset="0"/>
+            </a:endParaRPr>
+          </a:p>
+          <a:p>
+            <a:r>
+              <a:rPr lang="en-US" sz="1800" dirty="0" err="1" smtClean="0">
+                <a:latin typeface="Consolas" pitchFamily="49" charset="0"/>
+              </a:rPr>
+              <a:t>sudo</a:t>
+            </a:r>
+            <a:r>
+              <a:rPr lang="en-US" sz="1800" dirty="0" smtClean="0">
+                <a:latin typeface="Consolas" pitchFamily="49" charset="0"/>
+              </a:rPr>
+              <a:t> </a:t>
+            </a:r>
+            <a:r>
+              <a:rPr lang="en-US" sz="1800" dirty="0" err="1" smtClean="0">
+                <a:latin typeface="Consolas" pitchFamily="49" charset="0"/>
+              </a:rPr>
+              <a:t>mv</a:t>
+            </a:r>
+            <a:r>
+              <a:rPr lang="en-US" sz="1800" dirty="0" smtClean="0">
+                <a:latin typeface="Consolas" pitchFamily="49" charset="0"/>
+              </a:rPr>
+              <a:t> </a:t>
+            </a:r>
+            <a:r>
+              <a:rPr lang="en-US" sz="1800" dirty="0" err="1" smtClean="0">
+                <a:latin typeface="Consolas" pitchFamily="49" charset="0"/>
+              </a:rPr>
+              <a:t>gdrive</a:t>
+            </a:r>
+            <a:r>
+              <a:rPr lang="en-US" sz="1800" dirty="0" smtClean="0">
+                <a:latin typeface="Consolas" pitchFamily="49" charset="0"/>
+              </a:rPr>
+              <a:t> /</a:t>
+            </a:r>
+            <a:r>
+              <a:rPr lang="en-US" sz="1800" dirty="0" err="1" smtClean="0">
+                <a:latin typeface="Consolas" pitchFamily="49" charset="0"/>
+              </a:rPr>
+              <a:t>usr</a:t>
+            </a:r>
+            <a:r>
+              <a:rPr lang="en-US" sz="1800" dirty="0" smtClean="0">
+                <a:latin typeface="Consolas" pitchFamily="49" charset="0"/>
+              </a:rPr>
+              <a:t>/local/bin</a:t>
+            </a:r>
+            <a:endParaRPr lang="en-US" sz="1800" dirty="0">
+              <a:latin typeface="Consolas" pitchFamily="49" charset="0"/>
+            </a:endParaRPr>
+          </a:p>
+        </p:txBody>
+      </p:sp>
+    </p:spTree>
+  </p:cSld>
+  <p:clrMapOvr>
+    <a:masterClrMapping/>
+  </p:clrMapOvr>
+</p:sld>
+</file>
+
 <file path=ppt/slides/slide23.xml><?xml version="1.0" encoding="utf-8"?>
 <p:sld xmlns:a="http://schemas.openxmlformats.org/drawingml/2006/main" xmlns:r="http://schemas.openxmlformats.org/officeDocument/2006/relationships" xmlns:p="http://schemas.openxmlformats.org/presentationml/2006/main">
   <p:cSld>
@@ -5403,11 +5417,157 @@
             <a:pPr algn="l"/>
             <a:r>
               <a:rPr lang="en-US" dirty="0" smtClean="0"/>
-              <a:t>1. </a:t>
+              <a:t>2. Use </a:t>
+            </a:r>
+            <a:r>
+              <a:rPr lang="en-US" dirty="0" err="1" smtClean="0"/>
+              <a:t>gdrive</a:t>
             </a:r>
             <a:r>
               <a:rPr lang="en-US" dirty="0" smtClean="0"/>
-              <a:t>Install the Google Cloud CLI</a:t>
+              <a:t> on </a:t>
+            </a:r>
+            <a:r>
+              <a:rPr lang="en-US" smtClean="0"/>
+              <a:t>a Remote Server</a:t>
+            </a:r>
+            <a:endParaRPr lang="en-US" dirty="0"/>
+          </a:p>
+        </p:txBody>
+      </p:sp>
+      <p:sp>
+        <p:nvSpPr>
+          <p:cNvPr id="3" name="Content Placeholder 2"/>
+          <p:cNvSpPr>
+            <a:spLocks noGrp="1"/>
+          </p:cNvSpPr>
+          <p:nvPr>
+            <p:ph idx="1"/>
+          </p:nvPr>
+        </p:nvSpPr>
+        <p:spPr/>
+        <p:txBody>
+          <a:bodyPr/>
+          <a:lstStyle/>
+          <a:p>
+            <a:r>
+              <a:rPr lang="en-US" sz="2200" dirty="0" smtClean="0">
+                <a:latin typeface="Consolas" pitchFamily="49" charset="0"/>
+                <a:hlinkClick r:id="rId2"/>
+              </a:rPr>
+              <a:t>https://github.com/glotlabs/gdrive/#using-gdrive-on-a-remote-server</a:t>
+            </a:r>
+          </a:p>
+          <a:p>
+            <a:r>
+              <a:rPr lang="en-US" sz="2400" dirty="0" err="1" smtClean="0"/>
+              <a:t>gdrive</a:t>
+            </a:r>
+            <a:r>
+              <a:rPr lang="en-US" sz="2400" dirty="0" smtClean="0"/>
+              <a:t> account add</a:t>
+            </a:r>
+            <a:endParaRPr lang="en-US" sz="2200" dirty="0">
+              <a:latin typeface="Consolas" pitchFamily="49" charset="0"/>
+            </a:endParaRPr>
+          </a:p>
+        </p:txBody>
+      </p:sp>
+    </p:spTree>
+  </p:cSld>
+  <p:clrMapOvr>
+    <a:masterClrMapping/>
+  </p:clrMapOvr>
+</p:sld>
+</file>
+
+<file path=ppt/slides/slide24.xml><?xml version="1.0" encoding="utf-8"?>
+<p:sld xmlns:a="http://schemas.openxmlformats.org/drawingml/2006/main" xmlns:r="http://schemas.openxmlformats.org/officeDocument/2006/relationships" xmlns:p="http://schemas.openxmlformats.org/presentationml/2006/main">
+  <p:cSld>
+    <p:spTree>
+      <p:nvGrpSpPr>
+        <p:cNvPr id="1" name=""/>
+        <p:cNvGrpSpPr/>
+        <p:nvPr/>
+      </p:nvGrpSpPr>
+      <p:grpSpPr>
+        <a:xfrm>
+          <a:off x="0" y="0"/>
+          <a:ext cx="0" cy="0"/>
+          <a:chOff x="0" y="0"/>
+          <a:chExt cx="0" cy="0"/>
+        </a:xfrm>
+      </p:grpSpPr>
+      <p:pic>
+        <p:nvPicPr>
+          <p:cNvPr id="4" name="Picture 2" descr="https://lh3.ggpht.com/1IfZLL2QDSjZ0wS7sUhaMlsAOS8BBzdR3wZ1WawgRn7KZAM8nEVZYMOUM-lqQb0ikIzp=w300"/>
+          <p:cNvPicPr>
+            <a:picLocks noChangeAspect="1" noChangeArrowheads="1"/>
+          </p:cNvPicPr>
+          <p:nvPr/>
+        </p:nvPicPr>
+        <p:blipFill>
+          <a:blip r:embed="rId2" cstate="print"/>
+          <a:srcRect/>
+          <a:stretch>
+            <a:fillRect/>
+          </a:stretch>
+        </p:blipFill>
+        <p:spPr bwMode="auto">
+          <a:xfrm>
+            <a:off x="3276600" y="1905000"/>
+            <a:ext cx="2857500" cy="2857500"/>
+          </a:xfrm>
+          <a:prstGeom prst="rect">
+            <a:avLst/>
+          </a:prstGeom>
+          <a:noFill/>
+        </p:spPr>
+      </p:pic>
+    </p:spTree>
+  </p:cSld>
+  <p:clrMapOvr>
+    <a:masterClrMapping/>
+  </p:clrMapOvr>
+</p:sld>
+</file>
+
+<file path=ppt/slides/slide25.xml><?xml version="1.0" encoding="utf-8"?>
+<p:sld xmlns:a="http://schemas.openxmlformats.org/drawingml/2006/main" xmlns:r="http://schemas.openxmlformats.org/officeDocument/2006/relationships" xmlns:p="http://schemas.openxmlformats.org/presentationml/2006/main">
+  <p:cSld>
+    <p:spTree>
+      <p:nvGrpSpPr>
+        <p:cNvPr id="1" name=""/>
+        <p:cNvGrpSpPr/>
+        <p:nvPr/>
+      </p:nvGrpSpPr>
+      <p:grpSpPr>
+        <a:xfrm>
+          <a:off x="0" y="0"/>
+          <a:ext cx="0" cy="0"/>
+          <a:chOff x="0" y="0"/>
+          <a:chExt cx="0" cy="0"/>
+        </a:xfrm>
+      </p:grpSpPr>
+      <p:sp>
+        <p:nvSpPr>
+          <p:cNvPr id="2" name="Title 1"/>
+          <p:cNvSpPr>
+            <a:spLocks noGrp="1"/>
+          </p:cNvSpPr>
+          <p:nvPr>
+            <p:ph type="title"/>
+          </p:nvPr>
+        </p:nvSpPr>
+        <p:spPr/>
+        <p:txBody>
+          <a:bodyPr/>
+          <a:lstStyle/>
+          <a:p>
+            <a:pPr algn="l"/>
+            <a:r>
+              <a:rPr lang="en-US" dirty="0" smtClean="0"/>
+              <a:t>1. Install the Google Cloud CLI</a:t>
             </a:r>
             <a:endParaRPr lang="en-US" dirty="0"/>
           </a:p>
@@ -5432,13 +5592,7 @@
               <a:rPr lang="en-US" sz="2400" dirty="0" smtClean="0">
                 <a:hlinkClick r:id="rId2"/>
               </a:rPr>
-              <a:t>https://</a:t>
-            </a:r>
-            <a:r>
-              <a:rPr lang="en-US" sz="2400" dirty="0" smtClean="0">
-                <a:hlinkClick r:id="rId2"/>
-              </a:rPr>
-              <a:t>docs.cloud.google.com/sdk/docs/install-sdk</a:t>
+              <a:t>https://docs.cloud.google.com/sdk/docs/install-sdk</a:t>
             </a:r>
             <a:endParaRPr lang="en-US" sz="2400" dirty="0" smtClean="0"/>
           </a:p>
@@ -5487,7 +5641,7 @@
 </p:sld>
 </file>
 
-<file path=ppt/slides/slide24.xml><?xml version="1.0" encoding="utf-8"?>
+<file path=ppt/slides/slide26.xml><?xml version="1.0" encoding="utf-8"?>
 <p:sld xmlns:a="http://schemas.openxmlformats.org/drawingml/2006/main" xmlns:r="http://schemas.openxmlformats.org/officeDocument/2006/relationships" xmlns:p="http://schemas.openxmlformats.org/presentationml/2006/main">
   <p:cSld>
     <p:spTree>
@@ -5522,15 +5676,7 @@
             <a:pPr algn="l"/>
             <a:r>
               <a:rPr lang="en-US" dirty="0" smtClean="0"/>
-              <a:t>2. Log in </a:t>
-            </a:r>
-            <a:r>
-              <a:rPr lang="en-US" dirty="0" smtClean="0"/>
-              <a:t>Google </a:t>
-            </a:r>
-            <a:r>
-              <a:rPr lang="en-US" dirty="0" smtClean="0"/>
-              <a:t>Cloud</a:t>
+              <a:t>2. Log in Google Cloud</a:t>
             </a:r>
             <a:endParaRPr lang="en-US" dirty="0"/>
           </a:p>
@@ -5567,15 +5713,7 @@
             </a:r>
             <a:r>
               <a:rPr lang="en-US" sz="2400" dirty="0" smtClean="0"/>
-              <a:t> </a:t>
-            </a:r>
-            <a:r>
-              <a:rPr lang="en-US" sz="2400" dirty="0" smtClean="0"/>
-              <a:t>auth </a:t>
-            </a:r>
-            <a:r>
-              <a:rPr lang="en-US" sz="2400" dirty="0" smtClean="0"/>
-              <a:t>login</a:t>
+              <a:t> auth login</a:t>
             </a:r>
           </a:p>
           <a:p>
@@ -5623,7 +5761,7 @@
 </p:sld>
 </file>
 
-<file path=ppt/slides/slide25.xml><?xml version="1.0" encoding="utf-8"?>
+<file path=ppt/slides/slide27.xml><?xml version="1.0" encoding="utf-8"?>
 <p:sld xmlns:a="http://schemas.openxmlformats.org/drawingml/2006/main" xmlns:r="http://schemas.openxmlformats.org/officeDocument/2006/relationships" xmlns:p="http://schemas.openxmlformats.org/presentationml/2006/main">
   <p:cSld>
     <p:spTree>
@@ -5957,7 +6095,7 @@
             <a:pPr algn="l"/>
             <a:r>
               <a:rPr lang="en-US" dirty="0" smtClean="0"/>
-              <a:t>1. Create a Virtual Machine</a:t>
+              <a:t>1. Manage Projects</a:t>
             </a:r>
             <a:endParaRPr lang="en-US" dirty="0"/>
           </a:p>
@@ -5982,7 +6120,13 @@
               <a:rPr lang="en-US" sz="2400" dirty="0" smtClean="0">
                 <a:hlinkClick r:id="rId2"/>
               </a:rPr>
-              <a:t>https://console.cloud.google.com/freetrial/signup</a:t>
+              <a:t>https://</a:t>
+            </a:r>
+            <a:r>
+              <a:rPr lang="en-US" sz="2400" dirty="0" smtClean="0">
+                <a:hlinkClick r:id="rId2"/>
+              </a:rPr>
+              <a:t>console.cloud.google.com/cloud-resource-manager</a:t>
             </a:r>
             <a:endParaRPr lang="en-US" sz="2400" dirty="0" smtClean="0"/>
           </a:p>
@@ -5991,6 +6135,38 @@
           </a:p>
         </p:txBody>
       </p:sp>
+      <p:pic>
+        <p:nvPicPr>
+          <p:cNvPr id="1026" name="Picture 2"/>
+          <p:cNvPicPr>
+            <a:picLocks noChangeAspect="1" noChangeArrowheads="1"/>
+          </p:cNvPicPr>
+          <p:nvPr/>
+        </p:nvPicPr>
+        <p:blipFill>
+          <a:blip r:embed="rId3" cstate="print"/>
+          <a:srcRect/>
+          <a:stretch>
+            <a:fillRect/>
+          </a:stretch>
+        </p:blipFill>
+        <p:spPr bwMode="auto">
+          <a:xfrm>
+            <a:off x="1905000" y="2590800"/>
+            <a:ext cx="5586422" cy="3448286"/>
+          </a:xfrm>
+          <a:prstGeom prst="rect">
+            <a:avLst/>
+          </a:prstGeom>
+          <a:noFill/>
+          <a:ln w="9525">
+            <a:noFill/>
+            <a:miter lim="800000"/>
+            <a:headEnd/>
+            <a:tailEnd/>
+          </a:ln>
+        </p:spPr>
+      </p:pic>
     </p:spTree>
   </p:cSld>
   <p:clrMapOvr>
@@ -6085,7 +6261,7 @@
             <a:pPr algn="l"/>
             <a:r>
               <a:rPr lang="en-US" dirty="0" smtClean="0"/>
-              <a:t>1. Search for Google Drive Product</a:t>
+              <a:t>1. Create a Virtual Machine</a:t>
             </a:r>
             <a:endParaRPr lang="en-US" dirty="0"/>
           </a:p>
@@ -6110,7 +6286,7 @@
               <a:rPr lang="en-US" sz="2400" dirty="0" smtClean="0">
                 <a:hlinkClick r:id="rId2"/>
               </a:rPr>
-              <a:t>https://github.com/glotlabs/gdrive/blob/main/docs/create_google_api_credentials.md</a:t>
+              <a:t>https://console.cloud.google.com/freetrial/signup</a:t>
             </a:r>
             <a:endParaRPr lang="en-US" sz="2400" dirty="0" smtClean="0"/>
           </a:p>
@@ -6119,38 +6295,6 @@
           </a:p>
         </p:txBody>
       </p:sp>
-      <p:pic>
-        <p:nvPicPr>
-          <p:cNvPr id="4" name="Picture 3"/>
-          <p:cNvPicPr>
-            <a:picLocks noChangeAspect="1" noChangeArrowheads="1"/>
-          </p:cNvPicPr>
-          <p:nvPr/>
-        </p:nvPicPr>
-        <p:blipFill>
-          <a:blip r:embed="rId3" cstate="print"/>
-          <a:srcRect/>
-          <a:stretch>
-            <a:fillRect/>
-          </a:stretch>
-        </p:blipFill>
-        <p:spPr bwMode="auto">
-          <a:xfrm>
-            <a:off x="756918" y="3313326"/>
-            <a:ext cx="7701282" cy="2630274"/>
-          </a:xfrm>
-          <a:prstGeom prst="rect">
-            <a:avLst/>
-          </a:prstGeom>
-          <a:noFill/>
-          <a:ln w="9525">
-            <a:noFill/>
-            <a:miter lim="800000"/>
-            <a:headEnd/>
-            <a:tailEnd/>
-          </a:ln>
-        </p:spPr>
-      </p:pic>
     </p:spTree>
   </p:cSld>
   <p:clrMapOvr>
@@ -6176,33 +6320,9 @@
           <a:chExt cx="0" cy="0"/>
         </a:xfrm>
       </p:grpSpPr>
-      <p:sp>
-        <p:nvSpPr>
-          <p:cNvPr id="2" name="Title 1"/>
-          <p:cNvSpPr>
-            <a:spLocks noGrp="1"/>
-          </p:cNvSpPr>
-          <p:nvPr>
-            <p:ph type="title"/>
-          </p:nvPr>
-        </p:nvSpPr>
-        <p:spPr/>
-        <p:txBody>
-          <a:bodyPr/>
-          <a:lstStyle/>
-          <a:p>
-            <a:pPr algn="l"/>
-            <a:r>
-              <a:rPr lang="en-US" dirty="0" smtClean="0"/>
-              <a:t>2. Enable Google Drive API</a:t>
-            </a:r>
-            <a:endParaRPr lang="en-US" dirty="0"/>
-          </a:p>
-        </p:txBody>
-      </p:sp>
       <p:pic>
         <p:nvPicPr>
-          <p:cNvPr id="2050" name="Picture 2"/>
+          <p:cNvPr id="4" name="Picture 2" descr="https://lh3.ggpht.com/1IfZLL2QDSjZ0wS7sUhaMlsAOS8BBzdR3wZ1WawgRn7KZAM8nEVZYMOUM-lqQb0ikIzp=w300"/>
           <p:cNvPicPr>
             <a:picLocks noChangeAspect="1" noChangeArrowheads="1"/>
           </p:cNvPicPr>
@@ -6217,19 +6337,13 @@
         </p:blipFill>
         <p:spPr bwMode="auto">
           <a:xfrm>
-            <a:off x="1970088" y="2187575"/>
-            <a:ext cx="5203825" cy="2917825"/>
+            <a:off x="3276600" y="1905000"/>
+            <a:ext cx="2857500" cy="2857500"/>
           </a:xfrm>
           <a:prstGeom prst="rect">
             <a:avLst/>
           </a:prstGeom>
           <a:noFill/>
-          <a:ln w="9525">
-            <a:noFill/>
-            <a:miter lim="800000"/>
-            <a:headEnd/>
-            <a:tailEnd/>
-          </a:ln>
         </p:spPr>
       </p:pic>
     </p:spTree>
@@ -6275,22 +6389,50 @@
             <a:pPr algn="l"/>
             <a:r>
               <a:rPr lang="en-US" dirty="0" smtClean="0"/>
-              <a:t>3. Configure Consent Screen</a:t>
+              <a:t>1. Search for Google Drive Product</a:t>
             </a:r>
             <a:endParaRPr lang="en-US" dirty="0"/>
+          </a:p>
+        </p:txBody>
+      </p:sp>
+      <p:sp>
+        <p:nvSpPr>
+          <p:cNvPr id="3" name="Content Placeholder 2"/>
+          <p:cNvSpPr>
+            <a:spLocks noGrp="1"/>
+          </p:cNvSpPr>
+          <p:nvPr>
+            <p:ph idx="1"/>
+          </p:nvPr>
+        </p:nvSpPr>
+        <p:spPr/>
+        <p:txBody>
+          <a:bodyPr/>
+          <a:lstStyle/>
+          <a:p>
+            <a:r>
+              <a:rPr lang="en-US" sz="2400" dirty="0" smtClean="0">
+                <a:hlinkClick r:id="rId2"/>
+              </a:rPr>
+              <a:t>https://github.com/glotlabs/gdrive/blob/main/docs/create_google_api_credentials.md</a:t>
+            </a:r>
+            <a:endParaRPr lang="en-US" sz="2400" dirty="0" smtClean="0"/>
+          </a:p>
+          <a:p>
+            <a:endParaRPr lang="en-US" sz="2400" dirty="0"/>
           </a:p>
         </p:txBody>
       </p:sp>
       <p:pic>
         <p:nvPicPr>
-          <p:cNvPr id="3074" name="Picture 2"/>
+          <p:cNvPr id="4" name="Picture 3"/>
           <p:cNvPicPr>
             <a:picLocks noChangeAspect="1" noChangeArrowheads="1"/>
           </p:cNvPicPr>
           <p:nvPr/>
         </p:nvPicPr>
         <p:blipFill>
-          <a:blip r:embed="rId2" cstate="print"/>
+          <a:blip r:embed="rId3" cstate="print"/>
           <a:srcRect/>
           <a:stretch>
             <a:fillRect/>
@@ -6298,8 +6440,8 @@
         </p:blipFill>
         <p:spPr bwMode="auto">
           <a:xfrm>
-            <a:off x="547370" y="2667000"/>
-            <a:ext cx="8063230" cy="2000250"/>
+            <a:off x="756918" y="3313326"/>
+            <a:ext cx="7701282" cy="2630274"/>
           </a:xfrm>
           <a:prstGeom prst="rect">
             <a:avLst/>
